--- a/slides/pptx/week19.pptx
+++ b/slides/pptx/week19.pptx
@@ -1302,7 +1302,7 @@
     <p:bg>
       <p:bgPr>
         <a:solidFill>
-          <a:srgbClr val="0E1726"/>
+          <a:srgbClr val="FFFFFF"/>
         </a:solidFill>
       </p:bgPr>
     </p:bg>
@@ -1320,38 +1320,9 @@
           <a:chExt cx="0" cy="0"/>
         </a:xfrm>
       </p:grpSpPr>
-      <p:sp>
-        <p:nvSpPr>
-          <p:cNvPr id="2" name="Shape 0"/>
-          <p:cNvSpPr/>
-          <p:nvPr/>
-        </p:nvSpPr>
-        <p:spPr>
-          <a:xfrm>
-            <a:off x="603504" y="411480"/>
-            <a:ext cx="1874520" cy="932688"/>
-          </a:xfrm>
-          <a:prstGeom prst="roundRect">
-            <a:avLst>
-              <a:gd name="adj" fmla="val 7843"/>
-            </a:avLst>
-          </a:prstGeom>
-          <a:solidFill>
-            <a:srgbClr val="FFFFFF"/>
-          </a:solidFill>
-          <a:ln/>
-          <a:effectLst>
-            <a:outerShdw sx="100000" sy="100000" kx="0" ky="0" algn="bl" rotWithShape="0" blurRad="101600" dist="38100" dir="5400000">
-              <a:srgbClr val="000000">
-                <a:alpha val="35000"/>
-              </a:srgbClr>
-            </a:outerShdw>
-          </a:effectLst>
-        </p:spPr>
-      </p:sp>
       <p:pic>
         <p:nvPicPr>
-          <p:cNvPr id="3" name="Image 0" descr="/Users/pop7/Library/CloudStorage/OneDrive-MonsterConnectCo.,Ltd/Lecture/KOSEN69 - software-security/slides/pptx/assets/logo-small.png">    </p:cNvPr>
+          <p:cNvPr id="2" name="Image 0" descr="/Users/pop7/Library/CloudStorage/OneDrive-MonsterConnectCo.,Ltd/Lecture/KOSEN69 - software-security/slides/pptx/assets/logo-small.png">    </p:cNvPr>
           <p:cNvPicPr>
             <a:picLocks noChangeAspect="1"/>
           </p:cNvPicPr>
@@ -1365,8 +1336,8 @@
         </p:blipFill>
         <p:spPr>
           <a:xfrm>
-            <a:off x="758952" y="566928"/>
-            <a:ext cx="1563624" cy="621792"/>
+            <a:off x="640080" y="502920"/>
+            <a:ext cx="1691640" cy="676656"/>
           </a:xfrm>
           <a:prstGeom prst="rect">
             <a:avLst/>
@@ -1375,7 +1346,7 @@
       </p:pic>
       <p:sp>
         <p:nvSpPr>
-          <p:cNvPr id="4" name="Text 1"/>
+          <p:cNvPr id="3" name="Text 0"/>
           <p:cNvSpPr/>
           <p:nvPr/>
         </p:nvSpPr>
@@ -1414,7 +1385,7 @@
       </p:sp>
       <p:sp>
         <p:nvSpPr>
-          <p:cNvPr id="5" name="Text 2"/>
+          <p:cNvPr id="4" name="Text 1"/>
           <p:cNvSpPr/>
           <p:nvPr/>
         </p:nvSpPr>
@@ -1442,7 +1413,7 @@
             <a:r>
               <a:rPr lang="en-US" sz="4000" b="1" dirty="0">
                 <a:solidFill>
-                  <a:srgbClr val="E6EDF3"/>
+                  <a:srgbClr val="1F2937"/>
                 </a:solidFill>
                 <a:latin typeface="Arial" pitchFamily="34" charset="0"/>
                 <a:ea typeface="Arial" pitchFamily="34" charset="-122"/>
@@ -1456,7 +1427,7 @@
       </p:sp>
       <p:sp>
         <p:nvSpPr>
-          <p:cNvPr id="6" name="Text 3"/>
+          <p:cNvPr id="5" name="Text 2"/>
           <p:cNvSpPr/>
           <p:nvPr/>
         </p:nvSpPr>
@@ -1481,7 +1452,7 @@
             <a:r>
               <a:rPr lang="en-US" sz="1400" dirty="0">
                 <a:solidFill>
-                  <a:srgbClr val="94A3B8"/>
+                  <a:srgbClr val="64748B"/>
                 </a:solidFill>
                 <a:latin typeface="Calibri" pitchFamily="34" charset="0"/>
                 <a:ea typeface="Calibri" pitchFamily="34" charset="-122"/>
@@ -1507,7 +1478,7 @@
     <p:bg>
       <p:bgPr>
         <a:solidFill>
-          <a:srgbClr val="0E1726"/>
+          <a:srgbClr val="FFFFFF"/>
         </a:solidFill>
       </p:bgPr>
     </p:bg>
@@ -1544,9 +1515,9 @@
           </a:solidFill>
           <a:ln/>
           <a:effectLst>
-            <a:outerShdw sx="100000" sy="100000" kx="0" ky="0" algn="bl" rotWithShape="0" blurRad="101600" dist="38100" dir="5400000">
+            <a:outerShdw sx="100000" sy="100000" kx="0" ky="0" algn="bl" rotWithShape="0" blurRad="76200" dist="25400" dir="5400000">
               <a:srgbClr val="000000">
-                <a:alpha val="35000"/>
+                <a:alpha val="12000"/>
               </a:srgbClr>
             </a:outerShdw>
           </a:effectLst>
@@ -1603,7 +1574,7 @@
             <a:r>
               <a:rPr lang="en-US" sz="2600" b="1" dirty="0">
                 <a:solidFill>
-                  <a:srgbClr val="E6EDF3"/>
+                  <a:srgbClr val="1F2937"/>
                 </a:solidFill>
                 <a:latin typeface="Arial" pitchFamily="34" charset="0"/>
                 <a:ea typeface="Arial" pitchFamily="34" charset="-122"/>
@@ -1701,7 +1672,7 @@
             <a:r>
               <a:rPr lang="en-US" sz="1350" dirty="0">
                 <a:solidFill>
-                  <a:srgbClr val="E6EDF3"/>
+                  <a:srgbClr val="1F2937"/>
                 </a:solidFill>
                 <a:latin typeface="Calibri" pitchFamily="34" charset="0"/>
                 <a:ea typeface="Calibri" pitchFamily="34" charset="-122"/>
@@ -1799,7 +1770,7 @@
             <a:r>
               <a:rPr lang="en-US" sz="1350" dirty="0">
                 <a:solidFill>
-                  <a:srgbClr val="E6EDF3"/>
+                  <a:srgbClr val="1F2937"/>
                 </a:solidFill>
                 <a:latin typeface="Calibri" pitchFamily="34" charset="0"/>
                 <a:ea typeface="Calibri" pitchFamily="34" charset="-122"/>
@@ -1838,7 +1809,7 @@
             <a:r>
               <a:rPr lang="en-US" sz="900" dirty="0">
                 <a:solidFill>
-                  <a:srgbClr val="94A3B8"/>
+                  <a:srgbClr val="64748B"/>
                 </a:solidFill>
                 <a:latin typeface="Calibri" pitchFamily="34" charset="0"/>
                 <a:ea typeface="Calibri" pitchFamily="34" charset="-122"/>
@@ -1850,38 +1821,9 @@
           </a:p>
         </p:txBody>
       </p:sp>
-      <p:sp>
-        <p:nvSpPr>
-          <p:cNvPr id="12" name="Shape 9"/>
-          <p:cNvSpPr/>
-          <p:nvPr/>
-        </p:nvSpPr>
-        <p:spPr>
-          <a:xfrm>
-            <a:off x="7772400" y="4590288"/>
-            <a:ext cx="969264" cy="475488"/>
-          </a:xfrm>
-          <a:prstGeom prst="roundRect">
-            <a:avLst>
-              <a:gd name="adj" fmla="val 11538"/>
-            </a:avLst>
-          </a:prstGeom>
-          <a:solidFill>
-            <a:srgbClr val="FFFFFF"/>
-          </a:solidFill>
-          <a:ln/>
-          <a:effectLst>
-            <a:outerShdw sx="100000" sy="100000" kx="0" ky="0" algn="bl" rotWithShape="0" blurRad="101600" dist="38100" dir="5400000">
-              <a:srgbClr val="000000">
-                <a:alpha val="35000"/>
-              </a:srgbClr>
-            </a:outerShdw>
-          </a:effectLst>
-        </p:spPr>
-      </p:sp>
       <p:pic>
         <p:nvPicPr>
-          <p:cNvPr id="13" name="Image 1" descr="/Users/pop7/Library/CloudStorage/OneDrive-MonsterConnectCo.,Ltd/Lecture/KOSEN69 - software-security/slides/pptx/assets/logo-small.png">    </p:cNvPr>
+          <p:cNvPr id="12" name="Image 1" descr="/Users/pop7/Library/CloudStorage/OneDrive-MonsterConnectCo.,Ltd/Lecture/KOSEN69 - software-security/slides/pptx/assets/logo-small.png">    </p:cNvPr>
           <p:cNvPicPr>
             <a:picLocks noChangeAspect="1"/>
           </p:cNvPicPr>
@@ -1895,7 +1837,7 @@
         </p:blipFill>
         <p:spPr>
           <a:xfrm>
-            <a:off x="7872984" y="4681728"/>
+            <a:off x="7882128" y="4700016"/>
             <a:ext cx="768096" cy="356616"/>
           </a:xfrm>
           <a:prstGeom prst="rect">
@@ -1917,7 +1859,7 @@
     <p:bg>
       <p:bgPr>
         <a:solidFill>
-          <a:srgbClr val="0E1726"/>
+          <a:srgbClr val="FFFFFF"/>
         </a:solidFill>
       </p:bgPr>
     </p:bg>
@@ -1954,9 +1896,9 @@
           </a:solidFill>
           <a:ln/>
           <a:effectLst>
-            <a:outerShdw sx="100000" sy="100000" kx="0" ky="0" algn="bl" rotWithShape="0" blurRad="101600" dist="38100" dir="5400000">
+            <a:outerShdw sx="100000" sy="100000" kx="0" ky="0" algn="bl" rotWithShape="0" blurRad="76200" dist="25400" dir="5400000">
               <a:srgbClr val="000000">
-                <a:alpha val="35000"/>
+                <a:alpha val="12000"/>
               </a:srgbClr>
             </a:outerShdw>
           </a:effectLst>
@@ -2013,7 +1955,7 @@
             <a:r>
               <a:rPr lang="en-US" sz="2600" b="1" dirty="0">
                 <a:solidFill>
-                  <a:srgbClr val="E6EDF3"/>
+                  <a:srgbClr val="1F2937"/>
                 </a:solidFill>
                 <a:latin typeface="Arial" pitchFamily="34" charset="0"/>
                 <a:ea typeface="Arial" pitchFamily="34" charset="-122"/>
@@ -2042,13 +1984,13 @@
             </a:avLst>
           </a:prstGeom>
           <a:solidFill>
-            <a:srgbClr val="18243A"/>
+            <a:srgbClr val="F1F5F9"/>
           </a:solidFill>
           <a:ln/>
           <a:effectLst>
-            <a:outerShdw sx="100000" sy="100000" kx="0" ky="0" algn="bl" rotWithShape="0" blurRad="101600" dist="38100" dir="5400000">
+            <a:outerShdw sx="100000" sy="100000" kx="0" ky="0" algn="bl" rotWithShape="0" blurRad="76200" dist="25400" dir="5400000">
               <a:srgbClr val="000000">
-                <a:alpha val="35000"/>
+                <a:alpha val="12000"/>
               </a:srgbClr>
             </a:outerShdw>
           </a:effectLst>
@@ -2085,7 +2027,7 @@
             <a:r>
               <a:rPr lang="en-US" sz="1400" dirty="0">
                 <a:solidFill>
-                  <a:srgbClr val="E6EDF3"/>
+                  <a:srgbClr val="1F2937"/>
                 </a:solidFill>
                 <a:latin typeface="Calibri" pitchFamily="34" charset="0"/>
                 <a:ea typeface="Calibri" pitchFamily="34" charset="-122"/>
@@ -2106,7 +2048,7 @@
             <a:r>
               <a:rPr lang="en-US" sz="1400" dirty="0">
                 <a:solidFill>
-                  <a:srgbClr val="E6EDF3"/>
+                  <a:srgbClr val="1F2937"/>
                 </a:solidFill>
                 <a:latin typeface="Calibri" pitchFamily="34" charset="0"/>
                 <a:ea typeface="Calibri" pitchFamily="34" charset="-122"/>
@@ -2127,7 +2069,7 @@
             <a:r>
               <a:rPr lang="en-US" sz="1400" dirty="0">
                 <a:solidFill>
-                  <a:srgbClr val="E6EDF3"/>
+                  <a:srgbClr val="1F2937"/>
                 </a:solidFill>
                 <a:latin typeface="Calibri" pitchFamily="34" charset="0"/>
                 <a:ea typeface="Calibri" pitchFamily="34" charset="-122"/>
@@ -2166,7 +2108,7 @@
             <a:r>
               <a:rPr lang="en-US" sz="900" dirty="0">
                 <a:solidFill>
-                  <a:srgbClr val="94A3B8"/>
+                  <a:srgbClr val="64748B"/>
                 </a:solidFill>
                 <a:latin typeface="Calibri" pitchFamily="34" charset="0"/>
                 <a:ea typeface="Calibri" pitchFamily="34" charset="-122"/>
@@ -2178,38 +2120,9 @@
           </a:p>
         </p:txBody>
       </p:sp>
-      <p:sp>
-        <p:nvSpPr>
-          <p:cNvPr id="8" name="Shape 5"/>
-          <p:cNvSpPr/>
-          <p:nvPr/>
-        </p:nvSpPr>
-        <p:spPr>
-          <a:xfrm>
-            <a:off x="7772400" y="4590288"/>
-            <a:ext cx="969264" cy="475488"/>
-          </a:xfrm>
-          <a:prstGeom prst="roundRect">
-            <a:avLst>
-              <a:gd name="adj" fmla="val 11538"/>
-            </a:avLst>
-          </a:prstGeom>
-          <a:solidFill>
-            <a:srgbClr val="FFFFFF"/>
-          </a:solidFill>
-          <a:ln/>
-          <a:effectLst>
-            <a:outerShdw sx="100000" sy="100000" kx="0" ky="0" algn="bl" rotWithShape="0" blurRad="101600" dist="38100" dir="5400000">
-              <a:srgbClr val="000000">
-                <a:alpha val="35000"/>
-              </a:srgbClr>
-            </a:outerShdw>
-          </a:effectLst>
-        </p:spPr>
-      </p:sp>
       <p:pic>
         <p:nvPicPr>
-          <p:cNvPr id="9" name="Image 1" descr="/Users/pop7/Library/CloudStorage/OneDrive-MonsterConnectCo.,Ltd/Lecture/KOSEN69 - software-security/slides/pptx/assets/logo-small.png">    </p:cNvPr>
+          <p:cNvPr id="8" name="Image 1" descr="/Users/pop7/Library/CloudStorage/OneDrive-MonsterConnectCo.,Ltd/Lecture/KOSEN69 - software-security/slides/pptx/assets/logo-small.png">    </p:cNvPr>
           <p:cNvPicPr>
             <a:picLocks noChangeAspect="1"/>
           </p:cNvPicPr>
@@ -2223,7 +2136,7 @@
         </p:blipFill>
         <p:spPr>
           <a:xfrm>
-            <a:off x="7872984" y="4681728"/>
+            <a:off x="7882128" y="4700016"/>
             <a:ext cx="768096" cy="356616"/>
           </a:xfrm>
           <a:prstGeom prst="rect">
@@ -2245,7 +2158,7 @@
     <p:bg>
       <p:bgPr>
         <a:solidFill>
-          <a:srgbClr val="0E1726"/>
+          <a:srgbClr val="FFFFFF"/>
         </a:solidFill>
       </p:bgPr>
     </p:bg>
@@ -2282,9 +2195,9 @@
           </a:solidFill>
           <a:ln/>
           <a:effectLst>
-            <a:outerShdw sx="100000" sy="100000" kx="0" ky="0" algn="bl" rotWithShape="0" blurRad="101600" dist="38100" dir="5400000">
+            <a:outerShdw sx="100000" sy="100000" kx="0" ky="0" algn="bl" rotWithShape="0" blurRad="76200" dist="25400" dir="5400000">
               <a:srgbClr val="000000">
-                <a:alpha val="35000"/>
+                <a:alpha val="12000"/>
               </a:srgbClr>
             </a:outerShdw>
           </a:effectLst>
@@ -2341,7 +2254,7 @@
             <a:r>
               <a:rPr lang="en-US" sz="2600" b="1" dirty="0">
                 <a:solidFill>
-                  <a:srgbClr val="E6EDF3"/>
+                  <a:srgbClr val="1F2937"/>
                 </a:solidFill>
                 <a:latin typeface="Arial" pitchFamily="34" charset="0"/>
                 <a:ea typeface="Arial" pitchFamily="34" charset="-122"/>
@@ -2380,7 +2293,7 @@
             <a:r>
               <a:rPr lang="en-US" sz="1400" dirty="0">
                 <a:solidFill>
-                  <a:srgbClr val="E6EDF3"/>
+                  <a:srgbClr val="1F2937"/>
                 </a:solidFill>
                 <a:latin typeface="Calibri" pitchFamily="34" charset="0"/>
                 <a:ea typeface="Calibri" pitchFamily="34" charset="-122"/>
@@ -2409,13 +2322,13 @@
             </a:avLst>
           </a:prstGeom>
           <a:solidFill>
-            <a:srgbClr val="18243A"/>
+            <a:srgbClr val="F1F5F9"/>
           </a:solidFill>
           <a:ln/>
           <a:effectLst>
-            <a:outerShdw sx="100000" sy="100000" kx="0" ky="0" algn="bl" rotWithShape="0" blurRad="101600" dist="38100" dir="5400000">
+            <a:outerShdw sx="100000" sy="100000" kx="0" ky="0" algn="bl" rotWithShape="0" blurRad="76200" dist="25400" dir="5400000">
               <a:srgbClr val="000000">
-                <a:alpha val="35000"/>
+                <a:alpha val="12000"/>
               </a:srgbClr>
             </a:outerShdw>
           </a:effectLst>
@@ -2452,7 +2365,7 @@
             <a:r>
               <a:rPr lang="en-US" sz="1400" dirty="0">
                 <a:solidFill>
-                  <a:srgbClr val="E6EDF3"/>
+                  <a:srgbClr val="1F2937"/>
                 </a:solidFill>
                 <a:latin typeface="Calibri" pitchFamily="34" charset="0"/>
                 <a:ea typeface="Calibri" pitchFamily="34" charset="-122"/>
@@ -2473,7 +2386,7 @@
             <a:r>
               <a:rPr lang="en-US" sz="1400" dirty="0">
                 <a:solidFill>
-                  <a:srgbClr val="E6EDF3"/>
+                  <a:srgbClr val="1F2937"/>
                 </a:solidFill>
                 <a:latin typeface="Calibri" pitchFamily="34" charset="0"/>
                 <a:ea typeface="Calibri" pitchFamily="34" charset="-122"/>
@@ -2494,7 +2407,7 @@
             <a:r>
               <a:rPr lang="en-US" sz="1400" dirty="0">
                 <a:solidFill>
-                  <a:srgbClr val="E6EDF3"/>
+                  <a:srgbClr val="1F2937"/>
                 </a:solidFill>
                 <a:latin typeface="Calibri" pitchFamily="34" charset="0"/>
                 <a:ea typeface="Calibri" pitchFamily="34" charset="-122"/>
@@ -2515,7 +2428,7 @@
             <a:r>
               <a:rPr lang="en-US" sz="1400" dirty="0">
                 <a:solidFill>
-                  <a:srgbClr val="E6EDF3"/>
+                  <a:srgbClr val="1F2937"/>
                 </a:solidFill>
                 <a:latin typeface="Calibri" pitchFamily="34" charset="0"/>
                 <a:ea typeface="Calibri" pitchFamily="34" charset="-122"/>
@@ -2554,7 +2467,7 @@
             <a:r>
               <a:rPr lang="en-US" sz="900" dirty="0">
                 <a:solidFill>
-                  <a:srgbClr val="94A3B8"/>
+                  <a:srgbClr val="64748B"/>
                 </a:solidFill>
                 <a:latin typeface="Calibri" pitchFamily="34" charset="0"/>
                 <a:ea typeface="Calibri" pitchFamily="34" charset="-122"/>
@@ -2566,38 +2479,9 @@
           </a:p>
         </p:txBody>
       </p:sp>
-      <p:sp>
-        <p:nvSpPr>
-          <p:cNvPr id="9" name="Shape 6"/>
-          <p:cNvSpPr/>
-          <p:nvPr/>
-        </p:nvSpPr>
-        <p:spPr>
-          <a:xfrm>
-            <a:off x="7772400" y="4590288"/>
-            <a:ext cx="969264" cy="475488"/>
-          </a:xfrm>
-          <a:prstGeom prst="roundRect">
-            <a:avLst>
-              <a:gd name="adj" fmla="val 11538"/>
-            </a:avLst>
-          </a:prstGeom>
-          <a:solidFill>
-            <a:srgbClr val="FFFFFF"/>
-          </a:solidFill>
-          <a:ln/>
-          <a:effectLst>
-            <a:outerShdw sx="100000" sy="100000" kx="0" ky="0" algn="bl" rotWithShape="0" blurRad="101600" dist="38100" dir="5400000">
-              <a:srgbClr val="000000">
-                <a:alpha val="35000"/>
-              </a:srgbClr>
-            </a:outerShdw>
-          </a:effectLst>
-        </p:spPr>
-      </p:sp>
       <p:pic>
         <p:nvPicPr>
-          <p:cNvPr id="10" name="Image 1" descr="/Users/pop7/Library/CloudStorage/OneDrive-MonsterConnectCo.,Ltd/Lecture/KOSEN69 - software-security/slides/pptx/assets/logo-small.png">    </p:cNvPr>
+          <p:cNvPr id="9" name="Image 1" descr="/Users/pop7/Library/CloudStorage/OneDrive-MonsterConnectCo.,Ltd/Lecture/KOSEN69 - software-security/slides/pptx/assets/logo-small.png">    </p:cNvPr>
           <p:cNvPicPr>
             <a:picLocks noChangeAspect="1"/>
           </p:cNvPicPr>
@@ -2611,7 +2495,7 @@
         </p:blipFill>
         <p:spPr>
           <a:xfrm>
-            <a:off x="7872984" y="4681728"/>
+            <a:off x="7882128" y="4700016"/>
             <a:ext cx="768096" cy="356616"/>
           </a:xfrm>
           <a:prstGeom prst="rect">
@@ -2633,7 +2517,7 @@
     <p:bg>
       <p:bgPr>
         <a:solidFill>
-          <a:srgbClr val="0E1726"/>
+          <a:srgbClr val="FFFFFF"/>
         </a:solidFill>
       </p:bgPr>
     </p:bg>
@@ -2670,9 +2554,9 @@
           </a:solidFill>
           <a:ln/>
           <a:effectLst>
-            <a:outerShdw sx="100000" sy="100000" kx="0" ky="0" algn="bl" rotWithShape="0" blurRad="101600" dist="38100" dir="5400000">
+            <a:outerShdw sx="100000" sy="100000" kx="0" ky="0" algn="bl" rotWithShape="0" blurRad="76200" dist="25400" dir="5400000">
               <a:srgbClr val="000000">
-                <a:alpha val="35000"/>
+                <a:alpha val="12000"/>
               </a:srgbClr>
             </a:outerShdw>
           </a:effectLst>
@@ -2729,7 +2613,7 @@
             <a:r>
               <a:rPr lang="en-US" sz="2600" b="1" dirty="0">
                 <a:solidFill>
-                  <a:srgbClr val="E6EDF3"/>
+                  <a:srgbClr val="1F2937"/>
                 </a:solidFill>
                 <a:latin typeface="Arial" pitchFamily="34" charset="0"/>
                 <a:ea typeface="Arial" pitchFamily="34" charset="-122"/>
@@ -2758,13 +2642,13 @@
             </a:avLst>
           </a:prstGeom>
           <a:solidFill>
-            <a:srgbClr val="18243A"/>
+            <a:srgbClr val="F1F5F9"/>
           </a:solidFill>
           <a:ln/>
           <a:effectLst>
-            <a:outerShdw sx="100000" sy="100000" kx="0" ky="0" algn="bl" rotWithShape="0" blurRad="101600" dist="38100" dir="5400000">
+            <a:outerShdw sx="100000" sy="100000" kx="0" ky="0" algn="bl" rotWithShape="0" blurRad="76200" dist="25400" dir="5400000">
               <a:srgbClr val="000000">
-                <a:alpha val="35000"/>
+                <a:alpha val="12000"/>
               </a:srgbClr>
             </a:outerShdw>
           </a:effectLst>
@@ -2801,7 +2685,7 @@
             <a:r>
               <a:rPr lang="en-US" sz="1400" dirty="0">
                 <a:solidFill>
-                  <a:srgbClr val="E6EDF3"/>
+                  <a:srgbClr val="1F2937"/>
                 </a:solidFill>
                 <a:latin typeface="Calibri" pitchFamily="34" charset="0"/>
                 <a:ea typeface="Calibri" pitchFamily="34" charset="-122"/>
@@ -2822,7 +2706,7 @@
             <a:r>
               <a:rPr lang="en-US" sz="1400" dirty="0">
                 <a:solidFill>
-                  <a:srgbClr val="E6EDF3"/>
+                  <a:srgbClr val="1F2937"/>
                 </a:solidFill>
                 <a:latin typeface="Calibri" pitchFamily="34" charset="0"/>
                 <a:ea typeface="Calibri" pitchFamily="34" charset="-122"/>
@@ -2861,7 +2745,7 @@
             <a:r>
               <a:rPr lang="en-US" sz="900" dirty="0">
                 <a:solidFill>
-                  <a:srgbClr val="94A3B8"/>
+                  <a:srgbClr val="64748B"/>
                 </a:solidFill>
                 <a:latin typeface="Calibri" pitchFamily="34" charset="0"/>
                 <a:ea typeface="Calibri" pitchFamily="34" charset="-122"/>
@@ -2873,38 +2757,9 @@
           </a:p>
         </p:txBody>
       </p:sp>
-      <p:sp>
-        <p:nvSpPr>
-          <p:cNvPr id="8" name="Shape 5"/>
-          <p:cNvSpPr/>
-          <p:nvPr/>
-        </p:nvSpPr>
-        <p:spPr>
-          <a:xfrm>
-            <a:off x="7772400" y="4590288"/>
-            <a:ext cx="969264" cy="475488"/>
-          </a:xfrm>
-          <a:prstGeom prst="roundRect">
-            <a:avLst>
-              <a:gd name="adj" fmla="val 11538"/>
-            </a:avLst>
-          </a:prstGeom>
-          <a:solidFill>
-            <a:srgbClr val="FFFFFF"/>
-          </a:solidFill>
-          <a:ln/>
-          <a:effectLst>
-            <a:outerShdw sx="100000" sy="100000" kx="0" ky="0" algn="bl" rotWithShape="0" blurRad="101600" dist="38100" dir="5400000">
-              <a:srgbClr val="000000">
-                <a:alpha val="35000"/>
-              </a:srgbClr>
-            </a:outerShdw>
-          </a:effectLst>
-        </p:spPr>
-      </p:sp>
       <p:pic>
         <p:nvPicPr>
-          <p:cNvPr id="9" name="Image 1" descr="/Users/pop7/Library/CloudStorage/OneDrive-MonsterConnectCo.,Ltd/Lecture/KOSEN69 - software-security/slides/pptx/assets/logo-small.png">    </p:cNvPr>
+          <p:cNvPr id="8" name="Image 1" descr="/Users/pop7/Library/CloudStorage/OneDrive-MonsterConnectCo.,Ltd/Lecture/KOSEN69 - software-security/slides/pptx/assets/logo-small.png">    </p:cNvPr>
           <p:cNvPicPr>
             <a:picLocks noChangeAspect="1"/>
           </p:cNvPicPr>
@@ -2918,7 +2773,7 @@
         </p:blipFill>
         <p:spPr>
           <a:xfrm>
-            <a:off x="7872984" y="4681728"/>
+            <a:off x="7882128" y="4700016"/>
             <a:ext cx="768096" cy="356616"/>
           </a:xfrm>
           <a:prstGeom prst="rect">
@@ -2940,7 +2795,7 @@
     <p:bg>
       <p:bgPr>
         <a:solidFill>
-          <a:srgbClr val="0E1726"/>
+          <a:srgbClr val="FFFFFF"/>
         </a:solidFill>
       </p:bgPr>
     </p:bg>
@@ -2985,7 +2840,7 @@
             <a:r>
               <a:rPr lang="en-US" sz="4600" b="1" dirty="0">
                 <a:solidFill>
-                  <a:srgbClr val="E6EDF3"/>
+                  <a:srgbClr val="1F2937"/>
                 </a:solidFill>
                 <a:latin typeface="Arial" pitchFamily="34" charset="0"/>
                 <a:ea typeface="Arial" pitchFamily="34" charset="-122"/>
@@ -3036,38 +2891,9 @@
           </a:p>
         </p:txBody>
       </p:sp>
-      <p:sp>
-        <p:nvSpPr>
-          <p:cNvPr id="4" name="Shape 2"/>
-          <p:cNvSpPr/>
-          <p:nvPr/>
-        </p:nvSpPr>
-        <p:spPr>
-          <a:xfrm>
-            <a:off x="7772400" y="4590288"/>
-            <a:ext cx="969264" cy="475488"/>
-          </a:xfrm>
-          <a:prstGeom prst="roundRect">
-            <a:avLst>
-              <a:gd name="adj" fmla="val 11538"/>
-            </a:avLst>
-          </a:prstGeom>
-          <a:solidFill>
-            <a:srgbClr val="FFFFFF"/>
-          </a:solidFill>
-          <a:ln/>
-          <a:effectLst>
-            <a:outerShdw sx="100000" sy="100000" kx="0" ky="0" algn="bl" rotWithShape="0" blurRad="101600" dist="38100" dir="5400000">
-              <a:srgbClr val="000000">
-                <a:alpha val="35000"/>
-              </a:srgbClr>
-            </a:outerShdw>
-          </a:effectLst>
-        </p:spPr>
-      </p:sp>
       <p:pic>
         <p:nvPicPr>
-          <p:cNvPr id="5" name="Image 0" descr="/Users/pop7/Library/CloudStorage/OneDrive-MonsterConnectCo.,Ltd/Lecture/KOSEN69 - software-security/slides/pptx/assets/logo-small.png">    </p:cNvPr>
+          <p:cNvPr id="4" name="Image 0" descr="/Users/pop7/Library/CloudStorage/OneDrive-MonsterConnectCo.,Ltd/Lecture/KOSEN69 - software-security/slides/pptx/assets/logo-small.png">    </p:cNvPr>
           <p:cNvPicPr>
             <a:picLocks noChangeAspect="1"/>
           </p:cNvPicPr>
@@ -3081,7 +2907,7 @@
         </p:blipFill>
         <p:spPr>
           <a:xfrm>
-            <a:off x="7872984" y="4681728"/>
+            <a:off x="7882128" y="4700016"/>
             <a:ext cx="768096" cy="356616"/>
           </a:xfrm>
           <a:prstGeom prst="rect">

--- a/slides/pptx/week19.pptx
+++ b/slides/pptx/week19.pptx
@@ -507,7 +507,7 @@
           <a:p>
             <a:r>
               <a:rPr lang="en-US" dirty="0"/>
-              <a:t/>
+              <a:t>The finale — make it celebratory + high-energy. Before class: plant per-student/team flags, bring up all targets + CTFd, set the demo schedule. Confirm projects run. ~2 min.</a:t>
             </a:r>
             <a:endParaRPr lang="en-US" dirty="0"/>
           </a:p>
@@ -595,7 +595,7 @@
           <a:p>
             <a:r>
               <a:rPr lang="en-US" dirty="0"/>
-              <a:t/>
+              <a:t>Time-box the 240-min block: CTF tournament first (energy), then graded demos. Tell teams their demo slot up front.</a:t>
             </a:r>
             <a:endParaRPr lang="en-US" dirty="0"/>
           </a:p>
@@ -683,7 +683,7 @@
           <a:p>
             <a:r>
               <a:rPr lang="en-US" dirty="0"/>
-              <a:t/>
+              <a:t>Run from ctf.md + exams/item-bank.md (CTF pool, incl. the boss chain). Dynamic scoring + first-blood bonus on CTFd; announce first-bloods aloud for hype. Prizes for top Houses.</a:t>
             </a:r>
             <a:endParaRPr lang="en-US" dirty="0"/>
           </a:p>
@@ -771,7 +771,7 @@
           <a:p>
             <a:r>
               <a:rPr lang="en-US" dirty="0"/>
-              <a:t/>
+              <a:t>Graded on the project rubric (project/README.md) + the peer-contribution multiplier. Strict 15-min slots. Score live on the rubric; ask one probing Q each (viva-style) to confirm the work is theirs.</a:t>
             </a:r>
             <a:endParaRPr lang="en-US" dirty="0"/>
           </a:p>
@@ -859,7 +859,7 @@
           <a:p>
             <a:r>
               <a:rPr lang="en-US" dirty="0"/>
-              <a:t/>
+              <a:t>Checklist — anything missing costs rubric points. Confirm the CI pipeline actually fails on a finding (don't take their word; have them show it).</a:t>
             </a:r>
             <a:endParaRPr lang="en-US" dirty="0"/>
           </a:p>
@@ -947,7 +947,7 @@
           <a:p>
             <a:r>
               <a:rPr lang="en-US" dirty="0"/>
-              <a:t/>
+              <a:t>Close the term: name the arc (threat-model → break → fix → ship). Point to next steps (OWASP, CTFs, the readings). For the research: post-test + post-survey happen now (per the study timeline). Celebrate.</a:t>
             </a:r>
             <a:endParaRPr lang="en-US" dirty="0"/>
           </a:p>
